--- a/for-school/Ticali_Trio_Brief.pptx
+++ b/for-school/Ticali_Trio_Brief.pptx
@@ -115,26 +115,26 @@
   <p:extLst>
     <p:ext uri="{521415D9-36F7-43E2-AB2F-B90AF26B5E84}">
       <p14:sectionLst xmlns:p14="http://schemas.microsoft.com/office/powerpoint/2010/main">
-        <p14:section name="Overview" id="{6dd1dc9f-158c-e63a-af14-832d1264b02b}">
+        <p14:section name="Overview" id="{5a37bc00-03c8-be17-95eb-a102e04f7d48}">
           <p14:sldIdLst>
             <p14:sldId id="256"/>
             <p14:sldId id="257"/>
             <p14:sldId id="258"/>
           </p14:sldIdLst>
         </p14:section>
-        <p14:section name="How it works" id="{e7c1cf23-6818-43da-83a9-258fc548ab65}">
+        <p14:section name="How it works" id="{1b087da8-c731-caea-04a8-b75c2b2f68b6}">
           <p14:sldIdLst>
             <p14:sldId id="259"/>
             <p14:sldId id="260"/>
           </p14:sldIdLst>
         </p14:section>
-        <p14:section name="Curriculum and limits" id="{e5bdb138-b613-57df-c601-d2aba8df689e}">
+        <p14:section name="Curriculum and limits" id="{5cc0185f-abde-a543-ef7e-d1f3df78fb2c}">
           <p14:sldIdLst>
             <p14:sldId id="261"/>
             <p14:sldId id="262"/>
           </p14:sldIdLst>
         </p14:section>
-        <p14:section name="Trying it" id="{90311bfa-5009-fbcc-7d81-df595be033bb}">
+        <p14:section name="Trying it" id="{197c25ce-a74d-cccd-2e24-7fa5a071542e}">
           <p14:sldIdLst>
             <p14:sldId id="263"/>
             <p14:sldId id="264"/>
@@ -632,7 +632,7 @@
           <a:p>
             <a:r>
               <a:rPr lang="en-US" dirty="0"/>
-              <a:t>Ticali Trio is a learning game I made for my three children. It practices this year's grade-level work in the programs AACPS uses, Amplify CKLA for reading and Reveal Math for math, explains why each answer is right, and shows those programs' methods when a child is stuck. It is a single HTML file that opens in a web browser on a laptop or desktop, with no internet connection, account or sign-in needed, and no ads, tracking or purchases. It has not been reviewed or endorsed by AACPS or its teachers. The figures are counted from the game itself: 237 topic packs from kindergarten to 5th grade; more than 10,400 written questions, each with its own explanation and step-by-step coaching, and a hint wherever a second try is offered; 780 thinking puzzles; 11 packs of math generated fresh every round; and a Reading Road of 11 lands and 40 stops with 251 story pages and 440 questions. The screenshots in this brief come from the game, using a sample save made for the pictures, not the children's real progress.</a:t>
+              <a:t>Ticali Trio is a learning game I made for my three children. It practices this year's grade-level work in the programs AACPS uses, Amplify CKLA for reading and Reveal Math for math, explains why each answer is right, and shows those programs' methods when a child is stuck. It is a single HTML file that opens in a web browser on a laptop or desktop, with no internet connection, account or sign-in needed, and no ads, tracking or purchases. It has not been reviewed or endorsed by AACPS or its teachers. The figures are counted from the game itself: 237 topic packs from kindergarten to 5th grade; more than 10,400 written questions, each with its own explanation and step-by-step coaching, and a hint wherever a second try is offered; 780 thinking puzzles; 11 packs of math generated fresh every round; and a Reading Road of 11 lands and 40 stops with 251 story pages and 440 questions. The title screen has a card for each child and, below the cards, a button for every grade from kindergarten to 5th: pick a grade, then who is playing, or Just looking to try that grade without saving anything. The screenshots in this brief come from the game, using a sample save made for the pictures, not the children's real progress.</a:t>
             </a:r>
             <a:endParaRPr lang="en-US" dirty="0"/>
           </a:p>
@@ -720,7 +720,7 @@
           <a:p>
             <a:r>
               <a:rPr lang="en-US" dirty="0"/>
-              <a:t>The game has six aims. First, practice this year's work, with last year's kept for review and every grade from kindergarten to 5th one tap away. Second, understanding rather than just answering: every answer, right or wrong, is followed by an explanation, and on most question types a wrong answer gets a hint and one more try. Third, learning it the way the programs teach it: SHOW ME HOW walks through the method Reveal Math or CKLA teaches, step by step, using the question's own numbers and words. Fourth, thinking rather than guessing, with puzzle formats like those on Maryland's new MSTAR tests. Fifth, growing readers through the Reading Road and read-aloud in kindergarten and 1st grade: the Road's first five stops read their stories to the child, and after that each story uses only what the Road has taught so far. Sixth, keeping it fun and kind: levels, trophies, a buddy, stickers that teach a fact, daily missions with a day streak, boss battles, sprints against the child's own best and a family goal. Siblings are never ranked against each other, a pack is a round of ten questions, a wrong answer never takes progress away, and a missed day only starts a new day streak; the best streak is kept.</a:t>
+              <a:t>The game has six aims. First, practice this year's work, with last year's kept for review and a button on the title screen for every grade from kindergarten to 5th. Second, understanding rather than just answering: every answer, right or wrong, is followed by an explanation, and on most question types a wrong answer gets a hint and one more try. Third, learning it the way the programs teach it: SHOW ME HOW walks through the method Reveal Math or CKLA teaches, step by step, using the question's own numbers and words. Fourth, thinking rather than guessing, with puzzle formats like those on Maryland's new MSTAR tests. Fifth, growing readers through the Reading Road and read-aloud in kindergarten and 1st grade: the Road's first five stops read their stories to the child, and after that each story uses only what the Road has taught so far. Sixth, keeping it fun and kind: levels, trophies, a buddy, stickers that teach a fact, daily missions with a day streak, boss battles, sprints against the child's own best and a family goal. Siblings are never ranked against each other, a pack is a round of ten questions, a wrong answer never takes progress away, and a missed day only starts a new day streak; the best streak is kept.</a:t>
             </a:r>
             <a:endParaRPr lang="en-US" dirty="0"/>
           </a:p>
@@ -1160,7 +1160,7 @@
           <a:p>
             <a:r>
               <a:rPr lang="en-US" dirty="0"/>
-              <a:t>Privacy: there are no accounts and no names beyond the profile labels Kindergarten, 3rd Grade and 5th Grade. Progress is saved only in the browser on the device it is played on, and a child's answers are never sent anywhere. There are no ads, tracking or purchases. When online, the page loads its typefaces from Google Fonts, and some browsers' most natural read-aloud voices are online voices, which receive the words being read aloud: the game's own words, plus any name a 3rd or 5th grader types for their buddy. A parent can choose a voice built into the device instead. To try it: on a laptop or desktop, save the attached file Ticali_Trio_Family_Edition.html and double-click it; it opens in the web browser. If your email system held the file back, please let me know. On an iPad, an emailed or downloaded copy opens in a preview that does not run the game; an iPad runs it only from a web address, so please use a laptop or desktop. On the title screen, For grown-ups: about this game, above the three cards, explains what the game is, how it was made and its limits, and lists every grade's packs. Click a grade's card to open that child's hub, then a pack to play a round; Explore Any Grade, near the bottom of every hub, opens all of K-5. The small, faint parent link at the bottom right of the title screen opens the parent dashboard; the PIN is 0000. Anything you do stays on your own device and does not touch the children's progress at home.</a:t>
+              <a:t>Privacy: there are no accounts and no names beyond the profile labels Kindergarten, 3rd Grade and 5th Grade. Progress is saved only in the browser on the device it is played on, and a child's answers are never sent anywhere. There are no ads, tracking or purchases. When online, the page loads its typefaces from Google Fonts, and some browsers' most natural read-aloud voices are online voices, which receive the words being read aloud: the game's own words, plus any name a 3rd or 5th grader types for their buddy. A parent can choose a voice built into the device instead. To try it: on a laptop or desktop, save the attached file Ticali_Trio_Family_Edition.html and double-click it; it opens in the web browser. If your email system held the file back, please let me know. On an iPad, an emailed or downloaded copy opens in a preview that does not run the game; an iPad runs it only from a web address, so please use a laptop or desktop. On the title screen, For grown-ups: about this game, above the three cards, explains what the game is, how it was made and its limits, and lists every grade's packs. Click a child's card, Kindergarten, 3rd Grade or 5th Grade, to open that child's hub, then a pack to play a round. Below the cards, Every grade, K to 5, has a button for each grade from kindergarten to 5th. Pick a grade, then who is playing: a child, who earns the XP, or Just looking, which lets you try any grade without saving anything. Explore Any Grade, near the bottom of every hub, also opens all of K-5. The small, faint parent link at the bottom right of the title screen opens the parent dashboard; the PIN is 0000. Anything you do stays on your own device and does not touch the children's progress at home.</a:t>
             </a:r>
             <a:endParaRPr lang="en-US" dirty="0"/>
           </a:p>
@@ -2965,7 +2965,7 @@
       </p:sp>
       <p:pic>
         <p:nvPicPr>
-          <p:cNvPr id="17" name="Title screen screenshot" descr="The game's title screen: the Ticali Trio logo, the link For grown-ups: about this game, one card each for Kindergarten, 3rd Grade and 5th Grade, and the Family Team Goal. The small parent link is at the bottom right.">    </p:cNvPr>
+          <p:cNvPr id="17" name="Title screen screenshot" descr="The game's title screen: the Ticali Trio logo, the link For grown-ups: about this game, one card each for Kindergarten, 3rd Grade and 5th Grade, and below them Every grade, K to 5: a button for each grade from Kindergarten to 5th Grade, with its number of packs. The small parent link is at the bottom right.">    </p:cNvPr>
           <p:cNvPicPr>
             <a:picLocks noChangeAspect="1"/>
           </p:cNvPicPr>
@@ -3018,7 +3018,7 @@
         <p:spPr>
           <a:xfrm>
             <a:off x="6824167" y="4690722"/>
-            <a:ext cx="4818888" cy="822960"/>
+            <a:ext cx="4818888" cy="1005840"/>
           </a:xfrm>
           <a:prstGeom prst="rect">
             <a:avLst/>
@@ -3039,7 +3039,7 @@
                   <a:schemeClr val="tx2"/>
                 </a:solidFill>
               </a:rPr>
-              <a:t>The title screen: a link for grown-ups, one card per child, and a family goal the three reach together. The levels and stars shown come from a sample save made for these pictures, not the children’s real progress.</a:t>
+              <a:t>The title screen: a link for grown-ups, one card per child and, below them, a button for every grade, K-5. Pick a grade, then who is playing, or “Just looking” to try it without saving anything. The levels shown come from a sample save made for these pictures, not the children’s real progress.</a:t>
             </a:r>
             <a:endParaRPr lang="en-US" sz="1200" dirty="0"/>
           </a:p>
@@ -3292,7 +3292,7 @@
                   <a:schemeClr val="tx1"/>
                 </a:solidFill>
               </a:rPr>
-              <a:t>Each child’s hub holds this year’s work, with last year’s kept for review. Every grade from kindergarten to 5th is one tap away.</a:t>
+              <a:t>Each child’s hub holds this year’s work, with last year’s kept for review. Every grade from kindergarten to 5th has a button on the title screen.</a:t>
             </a:r>
             <a:endParaRPr lang="en-US" sz="1400" dirty="0"/>
           </a:p>
@@ -7117,7 +7117,7 @@
         <p:spPr>
           <a:xfrm>
             <a:off x="5989320" y="1325880"/>
-            <a:ext cx="5653735" cy="978408"/>
+            <a:ext cx="5653735" cy="914400"/>
           </a:xfrm>
           <a:prstGeom prst="rect">
             <a:avLst/>
@@ -7166,7 +7166,7 @@
         </p:nvSpPr>
         <p:spPr>
           <a:xfrm>
-            <a:off x="5303520" y="2395728"/>
+            <a:off x="5303520" y="2331720"/>
             <a:ext cx="502920" cy="502920"/>
           </a:xfrm>
           <a:prstGeom prst="ellipse">
@@ -7194,7 +7194,7 @@
         </p:blipFill>
         <p:spPr>
           <a:xfrm>
-            <a:off x="5424221" y="2516429"/>
+            <a:off x="5424221" y="2452421"/>
             <a:ext cx="261518" cy="261518"/>
           </a:xfrm>
           <a:prstGeom prst="rect">
@@ -7210,8 +7210,8 @@
         </p:nvSpPr>
         <p:spPr>
           <a:xfrm>
-            <a:off x="5989320" y="2377440"/>
-            <a:ext cx="5653735" cy="768096"/>
+            <a:off x="5989320" y="2313432"/>
+            <a:ext cx="5653735" cy="731520"/>
           </a:xfrm>
           <a:prstGeom prst="rect">
             <a:avLst/>
@@ -7260,7 +7260,7 @@
         </p:nvSpPr>
         <p:spPr>
           <a:xfrm>
-            <a:off x="5303520" y="3236976"/>
+            <a:off x="5303520" y="3136392"/>
             <a:ext cx="502920" cy="502920"/>
           </a:xfrm>
           <a:prstGeom prst="ellipse">
@@ -7288,7 +7288,7 @@
         </p:blipFill>
         <p:spPr>
           <a:xfrm>
-            <a:off x="5424221" y="3357677"/>
+            <a:off x="5424221" y="3257093"/>
             <a:ext cx="261518" cy="261518"/>
           </a:xfrm>
           <a:prstGeom prst="rect">
@@ -7304,8 +7304,8 @@
         </p:nvSpPr>
         <p:spPr>
           <a:xfrm>
-            <a:off x="5989320" y="3218688"/>
-            <a:ext cx="5653735" cy="768096"/>
+            <a:off x="5989320" y="3118104"/>
+            <a:ext cx="5653735" cy="731520"/>
           </a:xfrm>
           <a:prstGeom prst="rect">
             <a:avLst/>
@@ -7354,7 +7354,7 @@
         </p:nvSpPr>
         <p:spPr>
           <a:xfrm>
-            <a:off x="5303520" y="4078224"/>
+            <a:off x="5303520" y="3941064"/>
             <a:ext cx="502920" cy="502920"/>
           </a:xfrm>
           <a:prstGeom prst="ellipse">
@@ -7382,7 +7382,7 @@
         </p:blipFill>
         <p:spPr>
           <a:xfrm>
-            <a:off x="5424221" y="4198925"/>
+            <a:off x="5424221" y="4061765"/>
             <a:ext cx="261518" cy="261518"/>
           </a:xfrm>
           <a:prstGeom prst="rect">
@@ -7398,8 +7398,8 @@
         </p:nvSpPr>
         <p:spPr>
           <a:xfrm>
-            <a:off x="5989320" y="4059936"/>
-            <a:ext cx="5653735" cy="768096"/>
+            <a:off x="5989320" y="3922776"/>
+            <a:ext cx="5653735" cy="914400"/>
           </a:xfrm>
           <a:prstGeom prst="rect">
             <a:avLst/>
@@ -7434,7 +7434,7 @@
                   <a:schemeClr val="tx1"/>
                 </a:solidFill>
               </a:rPr>
-              <a:t>Click a grade’s card to open that child’s hub, then a pack to play a round. Explore Any Grade, near the bottom of every hub, opens all of K-5.</a:t>
+              <a:t>Click a child’s card to open their hub, then a pack to play a round. Below the cards, every grade, K-5, has a button: pick who is playing, or “Just looking” to try it without saving anything.</a:t>
             </a:r>
             <a:endParaRPr lang="en-US" sz="1400" dirty="0"/>
           </a:p>
@@ -7448,7 +7448,7 @@
         </p:nvSpPr>
         <p:spPr>
           <a:xfrm>
-            <a:off x="5303520" y="4919472"/>
+            <a:off x="5303520" y="4928616"/>
             <a:ext cx="502920" cy="502920"/>
           </a:xfrm>
           <a:prstGeom prst="ellipse">
@@ -7476,7 +7476,7 @@
         </p:blipFill>
         <p:spPr>
           <a:xfrm>
-            <a:off x="5424221" y="5040173"/>
+            <a:off x="5424221" y="5049317"/>
             <a:ext cx="261518" cy="261518"/>
           </a:xfrm>
           <a:prstGeom prst="rect">
@@ -7492,8 +7492,8 @@
         </p:nvSpPr>
         <p:spPr>
           <a:xfrm>
-            <a:off x="5989320" y="4901184"/>
-            <a:ext cx="5653735" cy="768096"/>
+            <a:off x="5989320" y="4910328"/>
+            <a:ext cx="5653735" cy="731520"/>
           </a:xfrm>
           <a:prstGeom prst="rect">
             <a:avLst/>
